--- a/outputs/produkte/mama-ceo/03-praesentationen/saeule-4/04-lektion-4-4.pptx
+++ b/outputs/produkte/mama-ceo/03-praesentationen/saeule-4/04-lektion-4-4.pptx
@@ -4353,6 +4353,14 @@
 <file path=ppt/slides/slide1.xml><?xml version="1.0" encoding="utf-8"?>
 <p:sld xmlns:a="http://schemas.openxmlformats.org/drawingml/2006/main" xmlns:p="http://schemas.openxmlformats.org/presentationml/2006/main" xmlns:r="http://schemas.openxmlformats.org/officeDocument/2006/relationships">
   <p:cSld>
+    <p:bg>
+      <p:bgPr>
+        <a:solidFill>
+          <a:srgbClr val="F1ECDD"/>
+        </a:solidFill>
+        <a:effectLst/>
+      </p:bgPr>
+    </p:bg>
     <p:spTree>
       <p:nvGrpSpPr>
         <p:cNvPr id="1" name=""/>
@@ -4628,6 +4636,14 @@
 <file path=ppt/slides/slide10.xml><?xml version="1.0" encoding="utf-8"?>
 <p:sld xmlns:a="http://schemas.openxmlformats.org/drawingml/2006/main" xmlns:p="http://schemas.openxmlformats.org/presentationml/2006/main" xmlns:r="http://schemas.openxmlformats.org/officeDocument/2006/relationships">
   <p:cSld>
+    <p:bg>
+      <p:bgPr>
+        <a:solidFill>
+          <a:srgbClr val="F1ECDD"/>
+        </a:solidFill>
+        <a:effectLst/>
+      </p:bgPr>
+    </p:bg>
     <p:spTree>
       <p:nvGrpSpPr>
         <p:cNvPr id="1" name=""/>
@@ -4703,7 +4719,7 @@
                 </a:solidFill>
                 <a:latin typeface="Calibri"/>
               </a:rPr>
-              <a:t>▸  </a:t>
+              <a:t>✓  </a:t>
             </a:r>
             <a:r>
               <a:rPr sz="1600" b="0">
@@ -4728,7 +4744,7 @@
                 </a:solidFill>
                 <a:latin typeface="Calibri"/>
               </a:rPr>
-              <a:t>▸  </a:t>
+              <a:t>✓  </a:t>
             </a:r>
             <a:r>
               <a:rPr sz="1600" b="0">
@@ -4753,7 +4769,7 @@
                 </a:solidFill>
                 <a:latin typeface="Calibri"/>
               </a:rPr>
-              <a:t>▸  </a:t>
+              <a:t>✓  </a:t>
             </a:r>
             <a:r>
               <a:rPr sz="1600" b="0">
@@ -4847,6 +4863,14 @@
 <file path=ppt/slides/slide11.xml><?xml version="1.0" encoding="utf-8"?>
 <p:sld xmlns:a="http://schemas.openxmlformats.org/drawingml/2006/main" xmlns:p="http://schemas.openxmlformats.org/presentationml/2006/main" xmlns:r="http://schemas.openxmlformats.org/officeDocument/2006/relationships">
   <p:cSld>
+    <p:bg>
+      <p:bgPr>
+        <a:solidFill>
+          <a:srgbClr val="F1ECDD"/>
+        </a:solidFill>
+        <a:effectLst/>
+      </p:bgPr>
+    </p:bg>
     <p:spTree>
       <p:nvGrpSpPr>
         <p:cNvPr id="1" name=""/>
@@ -4922,7 +4946,7 @@
                 </a:solidFill>
                 <a:latin typeface="Calibri"/>
               </a:rPr>
-              <a:t>▸  </a:t>
+              <a:t>✓  </a:t>
             </a:r>
             <a:r>
               <a:rPr sz="1600" b="0">
@@ -4947,7 +4971,7 @@
                 </a:solidFill>
                 <a:latin typeface="Calibri"/>
               </a:rPr>
-              <a:t>▸  </a:t>
+              <a:t>✓  </a:t>
             </a:r>
             <a:r>
               <a:rPr sz="1600" b="0">
@@ -4972,7 +4996,7 @@
                 </a:solidFill>
                 <a:latin typeface="Calibri"/>
               </a:rPr>
-              <a:t>▸  </a:t>
+              <a:t>✓  </a:t>
             </a:r>
             <a:r>
               <a:rPr sz="1600" b="0">
@@ -5066,6 +5090,14 @@
 <file path=ppt/slides/slide12.xml><?xml version="1.0" encoding="utf-8"?>
 <p:sld xmlns:a="http://schemas.openxmlformats.org/drawingml/2006/main" xmlns:p="http://schemas.openxmlformats.org/presentationml/2006/main" xmlns:r="http://schemas.openxmlformats.org/officeDocument/2006/relationships">
   <p:cSld>
+    <p:bg>
+      <p:bgPr>
+        <a:solidFill>
+          <a:srgbClr val="F1ECDD"/>
+        </a:solidFill>
+        <a:effectLst/>
+      </p:bgPr>
+    </p:bg>
     <p:spTree>
       <p:nvGrpSpPr>
         <p:cNvPr id="1" name=""/>
@@ -5141,7 +5173,7 @@
                 </a:solidFill>
                 <a:latin typeface="Calibri"/>
               </a:rPr>
-              <a:t>▸  </a:t>
+              <a:t>✓  </a:t>
             </a:r>
             <a:r>
               <a:rPr sz="1600" b="0">
@@ -5166,7 +5198,7 @@
                 </a:solidFill>
                 <a:latin typeface="Calibri"/>
               </a:rPr>
-              <a:t>▸  </a:t>
+              <a:t>✓  </a:t>
             </a:r>
             <a:r>
               <a:rPr sz="1600" b="0">
@@ -5191,7 +5223,7 @@
                 </a:solidFill>
                 <a:latin typeface="Calibri"/>
               </a:rPr>
-              <a:t>▸  </a:t>
+              <a:t>✓  </a:t>
             </a:r>
             <a:r>
               <a:rPr sz="1600" b="0">
@@ -5285,6 +5317,14 @@
 <file path=ppt/slides/slide13.xml><?xml version="1.0" encoding="utf-8"?>
 <p:sld xmlns:a="http://schemas.openxmlformats.org/drawingml/2006/main" xmlns:p="http://schemas.openxmlformats.org/presentationml/2006/main" xmlns:r="http://schemas.openxmlformats.org/officeDocument/2006/relationships">
   <p:cSld>
+    <p:bg>
+      <p:bgPr>
+        <a:solidFill>
+          <a:srgbClr val="F1ECDD"/>
+        </a:solidFill>
+        <a:effectLst/>
+      </p:bgPr>
+    </p:bg>
     <p:spTree>
       <p:nvGrpSpPr>
         <p:cNvPr id="1" name=""/>
@@ -5360,7 +5400,7 @@
                 </a:solidFill>
                 <a:latin typeface="Calibri"/>
               </a:rPr>
-              <a:t>▸  </a:t>
+              <a:t>✓  </a:t>
             </a:r>
             <a:r>
               <a:rPr sz="1600" b="0">
@@ -5385,7 +5425,7 @@
                 </a:solidFill>
                 <a:latin typeface="Calibri"/>
               </a:rPr>
-              <a:t>▸  </a:t>
+              <a:t>✓  </a:t>
             </a:r>
             <a:r>
               <a:rPr sz="1600" b="0">
@@ -5479,6 +5519,14 @@
 <file path=ppt/slides/slide2.xml><?xml version="1.0" encoding="utf-8"?>
 <p:sld xmlns:a="http://schemas.openxmlformats.org/drawingml/2006/main" xmlns:p="http://schemas.openxmlformats.org/presentationml/2006/main" xmlns:r="http://schemas.openxmlformats.org/officeDocument/2006/relationships">
   <p:cSld>
+    <p:bg>
+      <p:bgPr>
+        <a:solidFill>
+          <a:srgbClr val="F1ECDD"/>
+        </a:solidFill>
+        <a:effectLst/>
+      </p:bgPr>
+    </p:bg>
     <p:spTree>
       <p:nvGrpSpPr>
         <p:cNvPr id="1" name=""/>
@@ -5554,7 +5602,7 @@
                 </a:solidFill>
                 <a:latin typeface="Calibri"/>
               </a:rPr>
-              <a:t>▸  </a:t>
+              <a:t>✓  </a:t>
             </a:r>
             <a:r>
               <a:rPr sz="1600" b="0">
@@ -5579,7 +5627,7 @@
                 </a:solidFill>
                 <a:latin typeface="Calibri"/>
               </a:rPr>
-              <a:t>▸  </a:t>
+              <a:t>✓  </a:t>
             </a:r>
             <a:r>
               <a:rPr sz="1600" b="0">
@@ -5604,7 +5652,7 @@
                 </a:solidFill>
                 <a:latin typeface="Calibri"/>
               </a:rPr>
-              <a:t>▸  </a:t>
+              <a:t>✓  </a:t>
             </a:r>
             <a:r>
               <a:rPr sz="1600" b="0">
@@ -5698,6 +5746,14 @@
 <file path=ppt/slides/slide3.xml><?xml version="1.0" encoding="utf-8"?>
 <p:sld xmlns:a="http://schemas.openxmlformats.org/drawingml/2006/main" xmlns:p="http://schemas.openxmlformats.org/presentationml/2006/main" xmlns:r="http://schemas.openxmlformats.org/officeDocument/2006/relationships">
   <p:cSld>
+    <p:bg>
+      <p:bgPr>
+        <a:solidFill>
+          <a:srgbClr val="F1ECDD"/>
+        </a:solidFill>
+        <a:effectLst/>
+      </p:bgPr>
+    </p:bg>
     <p:spTree>
       <p:nvGrpSpPr>
         <p:cNvPr id="1" name=""/>
@@ -5773,7 +5829,7 @@
                 </a:solidFill>
                 <a:latin typeface="Calibri"/>
               </a:rPr>
-              <a:t>▸  </a:t>
+              <a:t>✓  </a:t>
             </a:r>
             <a:r>
               <a:rPr sz="1600" b="0">
@@ -5798,7 +5854,7 @@
                 </a:solidFill>
                 <a:latin typeface="Calibri"/>
               </a:rPr>
-              <a:t>▸  </a:t>
+              <a:t>✓  </a:t>
             </a:r>
             <a:r>
               <a:rPr sz="1600" b="0">
@@ -5823,7 +5879,7 @@
                 </a:solidFill>
                 <a:latin typeface="Calibri"/>
               </a:rPr>
-              <a:t>▸  </a:t>
+              <a:t>✓  </a:t>
             </a:r>
             <a:r>
               <a:rPr sz="1600" b="0">
@@ -5917,6 +5973,14 @@
 <file path=ppt/slides/slide4.xml><?xml version="1.0" encoding="utf-8"?>
 <p:sld xmlns:a="http://schemas.openxmlformats.org/drawingml/2006/main" xmlns:p="http://schemas.openxmlformats.org/presentationml/2006/main" xmlns:r="http://schemas.openxmlformats.org/officeDocument/2006/relationships">
   <p:cSld>
+    <p:bg>
+      <p:bgPr>
+        <a:solidFill>
+          <a:srgbClr val="F1ECDD"/>
+        </a:solidFill>
+        <a:effectLst/>
+      </p:bgPr>
+    </p:bg>
     <p:spTree>
       <p:nvGrpSpPr>
         <p:cNvPr id="1" name=""/>
@@ -5992,7 +6056,7 @@
                 </a:solidFill>
                 <a:latin typeface="Calibri"/>
               </a:rPr>
-              <a:t>▸  </a:t>
+              <a:t>✓  </a:t>
             </a:r>
             <a:r>
               <a:rPr sz="1600" b="0">
@@ -6017,7 +6081,7 @@
                 </a:solidFill>
                 <a:latin typeface="Calibri"/>
               </a:rPr>
-              <a:t>▸  </a:t>
+              <a:t>✓  </a:t>
             </a:r>
             <a:r>
               <a:rPr sz="1600" b="0">
@@ -6042,7 +6106,7 @@
                 </a:solidFill>
                 <a:latin typeface="Calibri"/>
               </a:rPr>
-              <a:t>▸  </a:t>
+              <a:t>✓  </a:t>
             </a:r>
             <a:r>
               <a:rPr sz="1600" b="0">
@@ -6136,6 +6200,14 @@
 <file path=ppt/slides/slide5.xml><?xml version="1.0" encoding="utf-8"?>
 <p:sld xmlns:a="http://schemas.openxmlformats.org/drawingml/2006/main" xmlns:p="http://schemas.openxmlformats.org/presentationml/2006/main" xmlns:r="http://schemas.openxmlformats.org/officeDocument/2006/relationships">
   <p:cSld>
+    <p:bg>
+      <p:bgPr>
+        <a:solidFill>
+          <a:srgbClr val="F1ECDD"/>
+        </a:solidFill>
+        <a:effectLst/>
+      </p:bgPr>
+    </p:bg>
     <p:spTree>
       <p:nvGrpSpPr>
         <p:cNvPr id="1" name=""/>
@@ -6211,7 +6283,7 @@
                 </a:solidFill>
                 <a:latin typeface="Calibri"/>
               </a:rPr>
-              <a:t>▸  </a:t>
+              <a:t>✓  </a:t>
             </a:r>
             <a:r>
               <a:rPr sz="1600" b="0">
@@ -6236,7 +6308,7 @@
                 </a:solidFill>
                 <a:latin typeface="Calibri"/>
               </a:rPr>
-              <a:t>▸  </a:t>
+              <a:t>✓  </a:t>
             </a:r>
             <a:r>
               <a:rPr sz="1600" b="0">
@@ -6261,7 +6333,7 @@
                 </a:solidFill>
                 <a:latin typeface="Calibri"/>
               </a:rPr>
-              <a:t>▸  </a:t>
+              <a:t>✓  </a:t>
             </a:r>
             <a:r>
               <a:rPr sz="1600" b="0">
@@ -6355,6 +6427,14 @@
 <file path=ppt/slides/slide6.xml><?xml version="1.0" encoding="utf-8"?>
 <p:sld xmlns:a="http://schemas.openxmlformats.org/drawingml/2006/main" xmlns:p="http://schemas.openxmlformats.org/presentationml/2006/main" xmlns:r="http://schemas.openxmlformats.org/officeDocument/2006/relationships">
   <p:cSld>
+    <p:bg>
+      <p:bgPr>
+        <a:solidFill>
+          <a:srgbClr val="F1ECDD"/>
+        </a:solidFill>
+        <a:effectLst/>
+      </p:bgPr>
+    </p:bg>
     <p:spTree>
       <p:nvGrpSpPr>
         <p:cNvPr id="1" name=""/>
@@ -6430,7 +6510,7 @@
                 </a:solidFill>
                 <a:latin typeface="Calibri"/>
               </a:rPr>
-              <a:t>▸  </a:t>
+              <a:t>✓  </a:t>
             </a:r>
             <a:r>
               <a:rPr sz="1600" b="0">
@@ -6455,7 +6535,7 @@
                 </a:solidFill>
                 <a:latin typeface="Calibri"/>
               </a:rPr>
-              <a:t>▸  </a:t>
+              <a:t>✓  </a:t>
             </a:r>
             <a:r>
               <a:rPr sz="1600" b="0">
@@ -6480,7 +6560,7 @@
                 </a:solidFill>
                 <a:latin typeface="Calibri"/>
               </a:rPr>
-              <a:t>▸  </a:t>
+              <a:t>✓  </a:t>
             </a:r>
             <a:r>
               <a:rPr sz="1600" b="0">
@@ -6574,6 +6654,14 @@
 <file path=ppt/slides/slide7.xml><?xml version="1.0" encoding="utf-8"?>
 <p:sld xmlns:a="http://schemas.openxmlformats.org/drawingml/2006/main" xmlns:p="http://schemas.openxmlformats.org/presentationml/2006/main" xmlns:r="http://schemas.openxmlformats.org/officeDocument/2006/relationships">
   <p:cSld>
+    <p:bg>
+      <p:bgPr>
+        <a:solidFill>
+          <a:srgbClr val="F1ECDD"/>
+        </a:solidFill>
+        <a:effectLst/>
+      </p:bgPr>
+    </p:bg>
     <p:spTree>
       <p:nvGrpSpPr>
         <p:cNvPr id="1" name=""/>
@@ -6649,7 +6737,7 @@
                 </a:solidFill>
                 <a:latin typeface="Calibri"/>
               </a:rPr>
-              <a:t>▸  </a:t>
+              <a:t>✓  </a:t>
             </a:r>
             <a:r>
               <a:rPr sz="1600" b="0">
@@ -6674,7 +6762,7 @@
                 </a:solidFill>
                 <a:latin typeface="Calibri"/>
               </a:rPr>
-              <a:t>▸  </a:t>
+              <a:t>✓  </a:t>
             </a:r>
             <a:r>
               <a:rPr sz="1600" b="0">
@@ -6699,7 +6787,7 @@
                 </a:solidFill>
                 <a:latin typeface="Calibri"/>
               </a:rPr>
-              <a:t>▸  </a:t>
+              <a:t>✓  </a:t>
             </a:r>
             <a:r>
               <a:rPr sz="1600" b="0">
@@ -6793,6 +6881,14 @@
 <file path=ppt/slides/slide8.xml><?xml version="1.0" encoding="utf-8"?>
 <p:sld xmlns:a="http://schemas.openxmlformats.org/drawingml/2006/main" xmlns:p="http://schemas.openxmlformats.org/presentationml/2006/main" xmlns:r="http://schemas.openxmlformats.org/officeDocument/2006/relationships">
   <p:cSld>
+    <p:bg>
+      <p:bgPr>
+        <a:solidFill>
+          <a:srgbClr val="F1ECDD"/>
+        </a:solidFill>
+        <a:effectLst/>
+      </p:bgPr>
+    </p:bg>
     <p:spTree>
       <p:nvGrpSpPr>
         <p:cNvPr id="1" name=""/>
@@ -6868,7 +6964,7 @@
                 </a:solidFill>
                 <a:latin typeface="Calibri"/>
               </a:rPr>
-              <a:t>▸  </a:t>
+              <a:t>✓  </a:t>
             </a:r>
             <a:r>
               <a:rPr sz="1600" b="0">
@@ -6893,7 +6989,7 @@
                 </a:solidFill>
                 <a:latin typeface="Calibri"/>
               </a:rPr>
-              <a:t>▸  </a:t>
+              <a:t>✓  </a:t>
             </a:r>
             <a:r>
               <a:rPr sz="1600" b="0">
@@ -6918,7 +7014,7 @@
                 </a:solidFill>
                 <a:latin typeface="Calibri"/>
               </a:rPr>
-              <a:t>▸  </a:t>
+              <a:t>✓  </a:t>
             </a:r>
             <a:r>
               <a:rPr sz="1600" b="0">
@@ -7012,6 +7108,14 @@
 <file path=ppt/slides/slide9.xml><?xml version="1.0" encoding="utf-8"?>
 <p:sld xmlns:a="http://schemas.openxmlformats.org/drawingml/2006/main" xmlns:p="http://schemas.openxmlformats.org/presentationml/2006/main" xmlns:r="http://schemas.openxmlformats.org/officeDocument/2006/relationships">
   <p:cSld>
+    <p:bg>
+      <p:bgPr>
+        <a:solidFill>
+          <a:srgbClr val="F1ECDD"/>
+        </a:solidFill>
+        <a:effectLst/>
+      </p:bgPr>
+    </p:bg>
     <p:spTree>
       <p:nvGrpSpPr>
         <p:cNvPr id="1" name=""/>
@@ -7087,7 +7191,7 @@
                 </a:solidFill>
                 <a:latin typeface="Calibri"/>
               </a:rPr>
-              <a:t>▸  </a:t>
+              <a:t>✓  </a:t>
             </a:r>
             <a:r>
               <a:rPr sz="1600" b="0">
@@ -7112,7 +7216,7 @@
                 </a:solidFill>
                 <a:latin typeface="Calibri"/>
               </a:rPr>
-              <a:t>▸  </a:t>
+              <a:t>✓  </a:t>
             </a:r>
             <a:r>
               <a:rPr sz="1600" b="0">
@@ -7137,7 +7241,7 @@
                 </a:solidFill>
                 <a:latin typeface="Calibri"/>
               </a:rPr>
-              <a:t>▸  </a:t>
+              <a:t>✓  </a:t>
             </a:r>
             <a:r>
               <a:rPr sz="1600" b="0">

--- a/outputs/produkte/mama-ceo/03-praesentationen/saeule-4/04-lektion-4-4.pptx
+++ b/outputs/produkte/mama-ceo/03-praesentationen/saeule-4/04-lektion-4-4.pptx
@@ -654,7 +654,7 @@
           <a:lstStyle/>
           <a:p>
             <a:r>
-              <a:t>Und für die, die irgendwann Blut lecken, zeig ich dir ehrlich, wie die Profi-Variante läuft. Das ist ein Bot, der Tag und Nacht auf einem kleinen Server liegt und mir jeden Morgen um halb sieben von selbst eine Telegram-Nachricht schickt. Dafür braucht es drei Dinge: du meldest deinen Bot kostenlos bei Telegram an, du brauchst einen Ort wo er rund um die Uhr läuft, das nennt man Hosting, und du brauchst ein bisschen Code, der die Verbindung macht.</a:t>
+              <a:t>Und für die, die irgendwann Blut lecken, zeig ich dir ehrlich, wie die Profi-Variante läuft. Das ist ein Bot, der Tag und Nacht auf einem kleinen Server liegt und mir jeden Morgen um halb sieben von selbst eine Telegram-Nachricht schickt. Dafür braucht es drei Dinge: du meldest deinen Bot kostenlos bei Telegram an, du brauchst einen Ort wo er rund um die Uhr läuft, das nennt man Hosting, und du brauchst ein bisschen Code, der die Verbindung macht. Und ganz wichtig, damit dir nicht graut: deinen Bot-Prompt von eben nimmst du eins zu eins mit, du schreibst nichts Neues. Der Prompt ist das Rezept und bleibt gleich, Claude Code baut nur die Hülle drumherum, also Telegram und den automatischen Versand. Cowork ist der Herd zu Hause, Claude Code ist die Lieferung an die Haustür.</a:t>
             </a:r>
           </a:p>
         </p:txBody>
@@ -5006,6 +5006,31 @@
                 <a:latin typeface="Calibri"/>
               </a:rPr>
               <a:t>Läuft auch wenn der Laptop zu ist</a:t>
+            </a:r>
+          </a:p>
+          <a:p>
+            <a:pPr>
+              <a:spcAft>
+                <a:spcPts val="1000"/>
+              </a:spcAft>
+            </a:pPr>
+            <a:r>
+              <a:rPr sz="1600" b="1">
+                <a:solidFill>
+                  <a:srgbClr val="12828C"/>
+                </a:solidFill>
+                <a:latin typeface="Calibri"/>
+              </a:rPr>
+              <a:t>✓  </a:t>
+            </a:r>
+            <a:r>
+              <a:rPr sz="1600" b="0">
+                <a:solidFill>
+                  <a:srgbClr val="2C3E50"/>
+                </a:solidFill>
+                <a:latin typeface="Calibri"/>
+              </a:rPr>
+              <a:t>Gleicher Prompt wie eben — du schreibst NICHTS neu</a:t>
             </a:r>
           </a:p>
         </p:txBody>
